--- a/docs/slides/story_20260716.pptx
+++ b/docs/slides/story_20260716.pptx
@@ -4334,8 +4334,8 @@
         </p:blipFill>
         <p:spPr>
           <a:xfrm>
-            <a:off x="2431931" y="1463040"/>
-            <a:ext cx="7327833" cy="2377440"/>
+            <a:off x="2441995" y="1463040"/>
+            <a:ext cx="7307704" cy="2377440"/>
           </a:xfrm>
           <a:prstGeom prst="rect">
             <a:avLst/>
@@ -4358,8 +4358,8 @@
         </p:blipFill>
         <p:spPr>
           <a:xfrm>
-            <a:off x="2727808" y="3931920"/>
-            <a:ext cx="6736079" cy="2377440"/>
+            <a:off x="2721017" y="3931920"/>
+            <a:ext cx="6749661" cy="2377440"/>
           </a:xfrm>
           <a:prstGeom prst="rect">
             <a:avLst/>
@@ -4476,8 +4476,8 @@
         </p:blipFill>
         <p:spPr>
           <a:xfrm>
-            <a:off x="2795149" y="1188720"/>
-            <a:ext cx="6601397" cy="5394960"/>
+            <a:off x="2792756" y="1188720"/>
+            <a:ext cx="6606183" cy="5394960"/>
           </a:xfrm>
           <a:prstGeom prst="rect">
             <a:avLst/>
@@ -4557,7 +4557,7 @@
         <p:spPr>
           <a:xfrm>
             <a:off x="472287" y="1188720"/>
-            <a:ext cx="11247120" cy="3692995"/>
+            <a:ext cx="11247120" cy="3675961"/>
           </a:xfrm>
           <a:prstGeom prst="rect">
             <a:avLst/>
@@ -4636,8 +4636,8 @@
         </p:blipFill>
         <p:spPr>
           <a:xfrm>
-            <a:off x="1454454" y="1188720"/>
-            <a:ext cx="9282786" cy="5394960"/>
+            <a:off x="1462671" y="1188720"/>
+            <a:ext cx="9266353" cy="5394960"/>
           </a:xfrm>
           <a:prstGeom prst="rect">
             <a:avLst/>
@@ -6895,7 +6895,7 @@
         <p:spPr>
           <a:xfrm>
             <a:off x="914400" y="1234440"/>
-            <a:ext cx="10332720" cy="3170266"/>
+            <a:ext cx="10332720" cy="3152615"/>
           </a:xfrm>
           <a:prstGeom prst="rect">
             <a:avLst/>
@@ -7365,7 +7365,7 @@
         <p:spPr>
           <a:xfrm>
             <a:off x="914400" y="1234440"/>
-            <a:ext cx="10332720" cy="4105276"/>
+            <a:ext cx="10332720" cy="4090790"/>
           </a:xfrm>
           <a:prstGeom prst="rect">
             <a:avLst/>
@@ -7445,7 +7445,7 @@
         <p:spPr>
           <a:xfrm>
             <a:off x="914400" y="1234440"/>
-            <a:ext cx="10332720" cy="3917479"/>
+            <a:ext cx="10332720" cy="3897584"/>
           </a:xfrm>
           <a:prstGeom prst="rect">
             <a:avLst/>
@@ -7643,7 +7643,7 @@
         <p:spPr>
           <a:xfrm>
             <a:off x="914400" y="1234440"/>
-            <a:ext cx="10332720" cy="6556412"/>
+            <a:ext cx="10332720" cy="6549560"/>
           </a:xfrm>
           <a:prstGeom prst="rect">
             <a:avLst/>
@@ -20501,8 +20501,8 @@
         </p:blipFill>
         <p:spPr>
           <a:xfrm>
-            <a:off x="2431931" y="1463040"/>
-            <a:ext cx="7327833" cy="2377440"/>
+            <a:off x="2441995" y="1463040"/>
+            <a:ext cx="7307704" cy="2377440"/>
           </a:xfrm>
           <a:prstGeom prst="rect">
             <a:avLst/>
@@ -20525,8 +20525,8 @@
         </p:blipFill>
         <p:spPr>
           <a:xfrm>
-            <a:off x="2727808" y="3931920"/>
-            <a:ext cx="6736079" cy="2377440"/>
+            <a:off x="2721017" y="3931920"/>
+            <a:ext cx="6749661" cy="2377440"/>
           </a:xfrm>
           <a:prstGeom prst="rect">
             <a:avLst/>
@@ -20643,8 +20643,8 @@
         </p:blipFill>
         <p:spPr>
           <a:xfrm>
-            <a:off x="2795149" y="1188720"/>
-            <a:ext cx="6601397" cy="5394960"/>
+            <a:off x="2792756" y="1188720"/>
+            <a:ext cx="6606183" cy="5394960"/>
           </a:xfrm>
           <a:prstGeom prst="rect">
             <a:avLst/>
@@ -20724,7 +20724,7 @@
         <p:spPr>
           <a:xfrm>
             <a:off x="472287" y="1188720"/>
-            <a:ext cx="11247120" cy="3390676"/>
+            <a:ext cx="11247120" cy="3386587"/>
           </a:xfrm>
           <a:prstGeom prst="rect">
             <a:avLst/>
